--- a/docs/Burnout-Pipeline-Sequence.pptx
+++ b/docs/Burnout-Pipeline-Sequence.pptx
@@ -502,43 +502,64 @@
           <a:lstStyle/>
           <a:p>
             <a:r>
-              <a:t>This slide shows the six-stage deterministic pipeline in execution order.</a:t>
+              <a:t>This slide shows the seven-stage pipeline in execution order. Stages 1–4 (deterministic metrics) and stage 5 (deterministic pre-pass) require no LLM. Stage 6 is the only AI step. Stage 7 closes the loop.</a:t>
             </a:r>
           </a:p>
           <a:p/>
           <a:p>
             <a:r>
-              <a:t>Stage 1 — Ingestion: GitHub issues are pulled into a versioned in-memory cache via authenticated MCP sync, the rate-limited public API, or the seed endpoint.</a:t>
+              <a:t>Stage 1 — Ingestion: GitHub issues are pulled into a versioned in-memory IssueCache via authenticated MCP sync, the rate-limited /demo/api/sync public endpoint, or the /demo/api/seed test endpoint.</a:t>
             </a:r>
           </a:p>
           <a:p/>
           <a:p>
             <a:r>
-              <a:t>Stage 2 — Chaos Metrics: Five boolean signals are evaluated first — mystery meat, unresolved urgents, context switching, after-hours activity, and label sprawl — producing a chaos score from 0 to 10. This runs BEFORE classification.</a:t>
+              <a:t>Stage 2 — Chaos Metrics: ChaosMetricsService evaluates five binary signals first — mystery meat (≥3 empty bodies), unresolved urgents (≥3), context switching (≥6 in 60 min), after-hours activity, label sprawl (≥12 distinct labels) — producing a chaos score from 0 to 10. Runs BEFORE classification.</a:t>
             </a:r>
           </a:p>
           <a:p/>
           <a:p>
             <a:r>
-              <a:t>Stage 3 — Classification &amp; Compliance: Each issue is sorted into one of four buckets (deep work, quick win, maintenance, deferred) and checked against eight compliance rules. The 3-3-3 day plan is also built here, with classification running a second time internally.</a:t>
+              <a:t>Stage 3 — Classification &amp; Compliance: IssueClassifierService sorts each issue into one of four buckets (deep work, quick win, maintenance, deferred) using first-match-wins label rules. ComplianceService checks 8 violation rules (score 100 → 0). The 3-3-3 day plan is built here as well.</a:t>
             </a:r>
           </a:p>
           <a:p/>
           <a:p>
             <a:r>
-              <a:t>Stage 4 — Stress Score: The WorldState aggregates chaos metrics, classification counts, and compliance into 12 capped variables. Six components (workload, chaos, context switching, clarity, sustained load, after-hours) are summed to produce a score from 0 to 100.</a:t>
+              <a:t>Stage 4 — Stress Score (BEFORE): WorldState aggregates chaos + classification + compliance into 12 capped variables. Six components are summed: Workload (0–40), Chaos (0–30), Context Switching (0–15), Clarity (0–10), Sustained (0–15), After Hours (0–10). Total capped at 100. This is the BEFORE score the demo starts at (~58).</a:t>
             </a:r>
           </a:p>
           <a:p/>
           <a:p>
             <a:r>
-              <a:t>Stage 5 — AI Agents: Only on reshape. A LangChain4j supervisor receives the fully-calculated WorldState and orchestrates five sub-agents that recommend label mutations. Every agent has a deterministic fallback when the LLM is unavailable.</a:t>
+              <a:t>Stage 5 — Deterministic Pre-pass (reshape only, no LLM): BurnoutSupervisorService runs two deterministic methods BEFORE any agent is invoked:</a:t>
+            </a:r>
+          </a:p>
+          <a:p>
+            <a:r>
+              <a:t>  • triageUrgent(n) is called directly for every unassigned-urgent issue, stripping the     `urgent` / `priority:critical` / `priority:high` labels and adding `triaged,backlog`.</a:t>
+            </a:r>
+          </a:p>
+          <a:p>
+            <a:r>
+              <a:t>  • defuseChaosInputs(clock) replaces empty bodies with a scope-pending placeholder and     normalises after-hours / touched-today timestamps to 10:00 in the demo clock zone.</a:t>
+            </a:r>
+          </a:p>
+          <a:p>
+            <a:r>
+              <a:t>These two calls guarantee the chaos score drops on every reshape, regardless of which sub-agents the LLM picks. Without this stage the demo's 58 → 8 drop would not be reliable.</a:t>
             </a:r>
           </a:p>
           <a:p/>
           <a:p>
             <a:r>
-              <a:t>Stage 6 — Output: Mutations are applied to the in-memory cache (not GitHub directly). Stress is recalculated on the mutated issues to show the drop. A Friday deploy score assesses release readiness. Every check-in is persisted as a JPA snapshot for longitudinal tracking.</a:t>
+              <a:t>Stage 6 — Supervisor + 6 Sub-Agents (reshape only, AI): AgenticServices.supervisorBuilder() with maxAgentsInvocations=15 and SupervisorResponseStrategy.SUMMARY orchestrates six sub-agents — TriageAgent, DeferAgent, DelegateAgent, ClassifyAgent, ScopeAgent, WellnessAgent — each backed by @Tool methods on BurnoutMutationTool that emit sealed GitHubAction records (AddLabels, RemoveLabels, Comment, Unassign, SetBody, SetUpdatedAt). Every agent has a deterministic fallback when the LLM is unavailable.</a:t>
+            </a:r>
+          </a:p>
+          <a:p/>
+          <a:p>
+            <a:r>
+              <a:t>Stage 7 — Output: Mutations are applied to the in-memory IssueCache (not to GitHub). The ENTIRE deterministic pipeline (stages 2–4) reruns on the mutated issues to produce the AFTER score (~8 in the demo). A Friday deploy score assesses release readiness (READY ≥ 80, CAUTION ≥ 50, NOT_READY &lt; 50). Every check-in is persisted as a JPA StressSnapshot for the longitudinal Study Dashboard.</a:t>
             </a:r>
           </a:p>
         </p:txBody>
@@ -3554,13 +3575,197 @@
       <p:grpSpPr/>
       <p:sp>
         <p:nvSpPr>
+          <p:cNvPr id="7" name="Rectangle 6"/>
+          <p:cNvSpPr/>
+          <p:nvPr/>
+        </p:nvSpPr>
+        <p:spPr>
+          <a:xfrm>
+            <a:off x="10343235" y="2011680"/>
+            <a:ext cx="1655064" cy="3337560"/>
+          </a:xfrm>
+          <a:prstGeom prst="rect">
+            <a:avLst/>
+          </a:prstGeom>
+          <a:solidFill>
+            <a:srgbClr val="0E0F1B"/>
+          </a:solidFill>
+          <a:ln w="6350">
+            <a:solidFill>
+              <a:srgbClr val="20233E"/>
+            </a:solidFill>
+          </a:ln>
+          <a:effectLst/>
+        </p:spPr>
+        <p:style>
+          <a:lnRef idx="1">
+            <a:schemeClr val="accent1"/>
+          </a:lnRef>
+          <a:fillRef idx="3">
+            <a:schemeClr val="accent1"/>
+          </a:fillRef>
+          <a:effectRef idx="2">
+            <a:schemeClr val="accent1"/>
+          </a:effectRef>
+          <a:fontRef idx="minor">
+            <a:schemeClr val="lt1"/>
+          </a:fontRef>
+        </p:style>
+        <p:txBody>
+          <a:bodyPr rtlCol="0" anchor="ctr"/>
+          <a:lstStyle/>
+          <a:p>
+            <a:pPr algn="ctr"/>
+          </a:p>
+        </p:txBody>
+      </p:sp>
+      <p:sp>
+        <p:nvSpPr>
+          <p:cNvPr id="6" name="Rectangle 5"/>
+          <p:cNvSpPr/>
+          <p:nvPr/>
+        </p:nvSpPr>
+        <p:spPr>
+          <a:xfrm>
+            <a:off x="8651595" y="2011680"/>
+            <a:ext cx="1655064" cy="3337560"/>
+          </a:xfrm>
+          <a:prstGeom prst="rect">
+            <a:avLst/>
+          </a:prstGeom>
+          <a:solidFill>
+            <a:srgbClr val="1B0C0E"/>
+          </a:solidFill>
+          <a:ln w="6350">
+            <a:solidFill>
+              <a:srgbClr val="3E1C21"/>
+            </a:solidFill>
+          </a:ln>
+          <a:effectLst/>
+        </p:spPr>
+        <p:style>
+          <a:lnRef idx="1">
+            <a:schemeClr val="accent1"/>
+          </a:lnRef>
+          <a:fillRef idx="3">
+            <a:schemeClr val="accent1"/>
+          </a:fillRef>
+          <a:effectRef idx="2">
+            <a:schemeClr val="accent1"/>
+          </a:effectRef>
+          <a:fontRef idx="minor">
+            <a:schemeClr val="lt1"/>
+          </a:fontRef>
+        </p:style>
+        <p:txBody>
+          <a:bodyPr rtlCol="0" anchor="ctr"/>
+          <a:lstStyle/>
+          <a:p>
+            <a:pPr algn="ctr"/>
+          </a:p>
+        </p:txBody>
+      </p:sp>
+      <p:sp>
+        <p:nvSpPr>
+          <p:cNvPr id="5" name="Rectangle 4"/>
+          <p:cNvSpPr/>
+          <p:nvPr/>
+        </p:nvSpPr>
+        <p:spPr>
+          <a:xfrm>
+            <a:off x="6959955" y="2011680"/>
+            <a:ext cx="1655064" cy="3337560"/>
+          </a:xfrm>
+          <a:prstGeom prst="rect">
+            <a:avLst/>
+          </a:prstGeom>
+          <a:solidFill>
+            <a:srgbClr val="051715"/>
+          </a:solidFill>
+          <a:ln w="6350">
+            <a:solidFill>
+              <a:srgbClr val="0B352F"/>
+            </a:solidFill>
+          </a:ln>
+          <a:effectLst/>
+        </p:spPr>
+        <p:style>
+          <a:lnRef idx="1">
+            <a:schemeClr val="accent1"/>
+          </a:lnRef>
+          <a:fillRef idx="3">
+            <a:schemeClr val="accent1"/>
+          </a:fillRef>
+          <a:effectRef idx="2">
+            <a:schemeClr val="accent1"/>
+          </a:effectRef>
+          <a:fontRef idx="minor">
+            <a:schemeClr val="lt1"/>
+          </a:fontRef>
+        </p:style>
+        <p:txBody>
+          <a:bodyPr rtlCol="0" anchor="ctr"/>
+          <a:lstStyle/>
+          <a:p>
+            <a:pPr algn="ctr"/>
+          </a:p>
+        </p:txBody>
+      </p:sp>
+      <p:sp>
+        <p:nvSpPr>
+          <p:cNvPr id="4" name="Rectangle 3"/>
+          <p:cNvSpPr/>
+          <p:nvPr/>
+        </p:nvSpPr>
+        <p:spPr>
+          <a:xfrm>
+            <a:off x="193395" y="2011680"/>
+            <a:ext cx="6729984" cy="3337560"/>
+          </a:xfrm>
+          <a:prstGeom prst="rect">
+            <a:avLst/>
+          </a:prstGeom>
+          <a:solidFill>
+            <a:srgbClr val="051715"/>
+          </a:solidFill>
+          <a:ln w="6350">
+            <a:solidFill>
+              <a:srgbClr val="0B352F"/>
+            </a:solidFill>
+          </a:ln>
+          <a:effectLst/>
+        </p:spPr>
+        <p:style>
+          <a:lnRef idx="1">
+            <a:schemeClr val="accent1"/>
+          </a:lnRef>
+          <a:fillRef idx="3">
+            <a:schemeClr val="accent1"/>
+          </a:fillRef>
+          <a:effectRef idx="2">
+            <a:schemeClr val="accent1"/>
+          </a:effectRef>
+          <a:fontRef idx="minor">
+            <a:schemeClr val="lt1"/>
+          </a:fontRef>
+        </p:style>
+        <p:txBody>
+          <a:bodyPr rtlCol="0" anchor="ctr"/>
+          <a:lstStyle/>
+          <a:p>
+            <a:pPr algn="ctr"/>
+          </a:p>
+        </p:txBody>
+      </p:sp>
+      <p:sp>
+        <p:nvSpPr>
           <p:cNvPr id="2" name="TextBox 1"/>
           <p:cNvSpPr txBox="1"/>
           <p:nvPr/>
         </p:nvSpPr>
         <p:spPr>
           <a:xfrm>
-            <a:off x="0" y="548640"/>
+            <a:off x="0" y="457200"/>
             <a:ext cx="12191695" cy="640080"/>
           </a:xfrm>
           <a:prstGeom prst="rect">
@@ -3596,7 +3801,7 @@
         </p:nvSpPr>
         <p:spPr>
           <a:xfrm>
-            <a:off x="0" y="1143000"/>
+            <a:off x="0" y="1051560"/>
             <a:ext cx="12191695" cy="365760"/>
           </a:xfrm>
           <a:prstGeom prst="rect">
@@ -3611,7 +3816,7 @@
           <a:lstStyle/>
           <a:p>
             <a:pPr algn="ctr">
-              <a:defRPr sz="1400">
+              <a:defRPr sz="1300">
                 <a:solidFill>
                   <a:srgbClr val="94A3B8"/>
                 </a:solidFill>
@@ -3619,21 +3824,165 @@
               </a:defRPr>
             </a:pPr>
             <a:r>
-              <a:t>Deterministic services compute all metrics  •  AI agents only explain &amp; act  •  Every agent has a fallback</a:t>
-            </a:r>
-          </a:p>
-        </p:txBody>
-      </p:sp>
-      <p:sp>
-        <p:nvSpPr>
-          <p:cNvPr id="4" name="Rounded Rectangle 3"/>
+              <a:t>Deterministic services compute every metric  •  Pre-pass guarantees the drop  •  AI agents only rebalance, never decide alone</a:t>
+            </a:r>
+          </a:p>
+        </p:txBody>
+      </p:sp>
+      <p:sp>
+        <p:nvSpPr>
+          <p:cNvPr id="8" name="TextBox 7"/>
+          <p:cNvSpPr txBox="1"/>
+          <p:nvPr/>
+        </p:nvSpPr>
+        <p:spPr>
+          <a:xfrm>
+            <a:off x="193395" y="1691640"/>
+            <a:ext cx="6729984" cy="274320"/>
+          </a:xfrm>
+          <a:prstGeom prst="rect">
+            <a:avLst/>
+          </a:prstGeom>
+          <a:noFill/>
+        </p:spPr>
+        <p:txBody>
+          <a:bodyPr wrap="square">
+            <a:spAutoFit/>
+          </a:bodyPr>
+          <a:lstStyle/>
+          <a:p>
+            <a:pPr algn="ctr">
+              <a:defRPr sz="1100" b="1">
+                <a:solidFill>
+                  <a:srgbClr val="2DD4BF"/>
+                </a:solidFill>
+                <a:latin typeface="Segoe UI"/>
+              </a:defRPr>
+            </a:pPr>
+            <a:r>
+              <a:t>DETERMINISTIC  ·  metrics</a:t>
+            </a:r>
+          </a:p>
+        </p:txBody>
+      </p:sp>
+      <p:sp>
+        <p:nvSpPr>
+          <p:cNvPr id="9" name="TextBox 8"/>
+          <p:cNvSpPr txBox="1"/>
+          <p:nvPr/>
+        </p:nvSpPr>
+        <p:spPr>
+          <a:xfrm>
+            <a:off x="6959955" y="1691640"/>
+            <a:ext cx="1655064" cy="274320"/>
+          </a:xfrm>
+          <a:prstGeom prst="rect">
+            <a:avLst/>
+          </a:prstGeom>
+          <a:noFill/>
+        </p:spPr>
+        <p:txBody>
+          <a:bodyPr wrap="square">
+            <a:spAutoFit/>
+          </a:bodyPr>
+          <a:lstStyle/>
+          <a:p>
+            <a:pPr algn="ctr">
+              <a:defRPr sz="1100" b="1">
+                <a:solidFill>
+                  <a:srgbClr val="2DD4BF"/>
+                </a:solidFill>
+                <a:latin typeface="Segoe UI"/>
+              </a:defRPr>
+            </a:pPr>
+            <a:r>
+              <a:t>DETERMINISTIC  ·  pre-pass</a:t>
+            </a:r>
+          </a:p>
+        </p:txBody>
+      </p:sp>
+      <p:sp>
+        <p:nvSpPr>
+          <p:cNvPr id="10" name="TextBox 9"/>
+          <p:cNvSpPr txBox="1"/>
+          <p:nvPr/>
+        </p:nvSpPr>
+        <p:spPr>
+          <a:xfrm>
+            <a:off x="8651595" y="1691640"/>
+            <a:ext cx="1655064" cy="274320"/>
+          </a:xfrm>
+          <a:prstGeom prst="rect">
+            <a:avLst/>
+          </a:prstGeom>
+          <a:noFill/>
+        </p:spPr>
+        <p:txBody>
+          <a:bodyPr wrap="square">
+            <a:spAutoFit/>
+          </a:bodyPr>
+          <a:lstStyle/>
+          <a:p>
+            <a:pPr algn="ctr">
+              <a:defRPr sz="1100" b="1">
+                <a:solidFill>
+                  <a:srgbClr val="FB7185"/>
+                </a:solidFill>
+                <a:latin typeface="Segoe UI"/>
+              </a:defRPr>
+            </a:pPr>
+            <a:r>
+              <a:t>AI</a:t>
+            </a:r>
+          </a:p>
+        </p:txBody>
+      </p:sp>
+      <p:sp>
+        <p:nvSpPr>
+          <p:cNvPr id="11" name="TextBox 10"/>
+          <p:cNvSpPr txBox="1"/>
+          <p:nvPr/>
+        </p:nvSpPr>
+        <p:spPr>
+          <a:xfrm>
+            <a:off x="10343235" y="1691640"/>
+            <a:ext cx="1655064" cy="274320"/>
+          </a:xfrm>
+          <a:prstGeom prst="rect">
+            <a:avLst/>
+          </a:prstGeom>
+          <a:noFill/>
+        </p:spPr>
+        <p:txBody>
+          <a:bodyPr wrap="square">
+            <a:spAutoFit/>
+          </a:bodyPr>
+          <a:lstStyle/>
+          <a:p>
+            <a:pPr algn="ctr">
+              <a:defRPr sz="1100" b="1">
+                <a:solidFill>
+                  <a:srgbClr val="818CF8"/>
+                </a:solidFill>
+                <a:latin typeface="Segoe UI"/>
+              </a:defRPr>
+            </a:pPr>
+            <a:r>
+              <a:t>OUTPUT</a:t>
+            </a:r>
+          </a:p>
+        </p:txBody>
+      </p:sp>
+      <p:sp>
+        <p:nvSpPr>
+          <p:cNvPr id="12" name="Rounded Rectangle 11"/>
           <p:cNvSpPr/>
           <p:nvPr/>
         </p:nvSpPr>
         <p:spPr>
           <a:xfrm>
-            <a:off x="426567" y="2194560"/>
-            <a:ext cx="1508760" cy="2743200"/>
+            <a:off x="357987" y="2194560"/>
+            <a:ext cx="1325880" cy="2926080"/>
           </a:xfrm>
           <a:prstGeom prst="roundRect">
             <a:avLst>
@@ -3674,13 +4023,13 @@
       </p:sp>
       <p:sp>
         <p:nvSpPr>
-          <p:cNvPr id="5" name="Oval 4"/>
+          <p:cNvPr id="13" name="Oval 12"/>
           <p:cNvSpPr/>
           <p:nvPr/>
         </p:nvSpPr>
         <p:spPr>
           <a:xfrm>
-            <a:off x="929487" y="2468880"/>
+            <a:off x="769467" y="2468880"/>
             <a:ext cx="502920" cy="502920"/>
           </a:xfrm>
           <a:prstGeom prst="ellipse">
@@ -3734,14 +4083,14 @@
       </p:sp>
       <p:sp>
         <p:nvSpPr>
-          <p:cNvPr id="6" name="TextBox 5"/>
+          <p:cNvPr id="14" name="TextBox 13"/>
           <p:cNvSpPr txBox="1"/>
           <p:nvPr/>
         </p:nvSpPr>
         <p:spPr>
           <a:xfrm>
-            <a:off x="518007" y="3154680"/>
-            <a:ext cx="1325880" cy="457200"/>
+            <a:off x="431139" y="3154680"/>
+            <a:ext cx="1179576" cy="594360"/>
           </a:xfrm>
           <a:prstGeom prst="rect">
             <a:avLst/>
@@ -3755,7 +4104,7 @@
           <a:lstStyle/>
           <a:p>
             <a:pPr algn="ctr">
-              <a:defRPr sz="1500" b="1">
+              <a:defRPr sz="1400" b="1">
                 <a:solidFill>
                   <a:srgbClr val="F8FAFC"/>
                 </a:solidFill>
@@ -3770,14 +4119,14 @@
       </p:sp>
       <p:sp>
         <p:nvSpPr>
-          <p:cNvPr id="7" name="TextBox 6"/>
+          <p:cNvPr id="15" name="TextBox 14"/>
           <p:cNvSpPr txBox="1"/>
           <p:nvPr/>
         </p:nvSpPr>
         <p:spPr>
           <a:xfrm>
-            <a:off x="518007" y="3657600"/>
-            <a:ext cx="1325880" cy="1097280"/>
+            <a:off x="431139" y="3749040"/>
+            <a:ext cx="1179576" cy="1280160"/>
           </a:xfrm>
           <a:prstGeom prst="rect">
             <a:avLst/>
@@ -3792,9 +4141,9 @@
           <a:p>
             <a:pPr algn="ctr">
               <a:lnSpc>
-                <a:spcPts val="1800"/>
+                <a:spcPts val="1500"/>
               </a:lnSpc>
-              <a:defRPr sz="1300">
+              <a:defRPr sz="1100">
                 <a:solidFill>
                   <a:srgbClr val="94A3B8"/>
                 </a:solidFill>
@@ -3813,14 +4162,14 @@
       </p:sp>
       <p:sp>
         <p:nvSpPr>
-          <p:cNvPr id="8" name="Right Arrow 7"/>
+          <p:cNvPr id="16" name="Right Arrow 15"/>
           <p:cNvSpPr/>
           <p:nvPr/>
         </p:nvSpPr>
         <p:spPr>
           <a:xfrm>
-            <a:off x="1953615" y="3429000"/>
-            <a:ext cx="420624" cy="274320"/>
+            <a:off x="1702155" y="3520440"/>
+            <a:ext cx="329184" cy="274320"/>
           </a:xfrm>
           <a:prstGeom prst="rightArrow">
             <a:avLst/>
@@ -3857,14 +4206,14 @@
       </p:sp>
       <p:sp>
         <p:nvSpPr>
-          <p:cNvPr id="9" name="Rounded Rectangle 8"/>
+          <p:cNvPr id="17" name="Rounded Rectangle 16"/>
           <p:cNvSpPr/>
           <p:nvPr/>
         </p:nvSpPr>
         <p:spPr>
           <a:xfrm>
-            <a:off x="2392527" y="2194560"/>
-            <a:ext cx="1508760" cy="2743200"/>
+            <a:off x="2049627" y="2194560"/>
+            <a:ext cx="1325880" cy="2926080"/>
           </a:xfrm>
           <a:prstGeom prst="roundRect">
             <a:avLst>
@@ -3905,13 +4254,13 @@
       </p:sp>
       <p:sp>
         <p:nvSpPr>
-          <p:cNvPr id="10" name="Oval 9"/>
+          <p:cNvPr id="18" name="Oval 17"/>
           <p:cNvSpPr/>
           <p:nvPr/>
         </p:nvSpPr>
         <p:spPr>
           <a:xfrm>
-            <a:off x="2895447" y="2468880"/>
+            <a:off x="2461107" y="2468880"/>
             <a:ext cx="502920" cy="502920"/>
           </a:xfrm>
           <a:prstGeom prst="ellipse">
@@ -3965,14 +4314,14 @@
       </p:sp>
       <p:sp>
         <p:nvSpPr>
-          <p:cNvPr id="11" name="TextBox 10"/>
+          <p:cNvPr id="19" name="TextBox 18"/>
           <p:cNvSpPr txBox="1"/>
           <p:nvPr/>
         </p:nvSpPr>
         <p:spPr>
           <a:xfrm>
-            <a:off x="2483967" y="3154680"/>
-            <a:ext cx="1325880" cy="457200"/>
+            <a:off x="2122779" y="3154680"/>
+            <a:ext cx="1179576" cy="594360"/>
           </a:xfrm>
           <a:prstGeom prst="rect">
             <a:avLst/>
@@ -3986,7 +4335,7 @@
           <a:lstStyle/>
           <a:p>
             <a:pPr algn="ctr">
-              <a:defRPr sz="1500" b="1">
+              <a:defRPr sz="1400" b="1">
                 <a:solidFill>
                   <a:srgbClr val="F8FAFC"/>
                 </a:solidFill>
@@ -4001,14 +4350,14 @@
       </p:sp>
       <p:sp>
         <p:nvSpPr>
-          <p:cNvPr id="12" name="TextBox 11"/>
+          <p:cNvPr id="20" name="TextBox 19"/>
           <p:cNvSpPr txBox="1"/>
           <p:nvPr/>
         </p:nvSpPr>
         <p:spPr>
           <a:xfrm>
-            <a:off x="2483967" y="3657600"/>
-            <a:ext cx="1325880" cy="1097280"/>
+            <a:off x="2122779" y="3749040"/>
+            <a:ext cx="1179576" cy="1280160"/>
           </a:xfrm>
           <a:prstGeom prst="rect">
             <a:avLst/>
@@ -4023,9 +4372,9 @@
           <a:p>
             <a:pPr algn="ctr">
               <a:lnSpc>
-                <a:spcPts val="1800"/>
+                <a:spcPts val="1500"/>
               </a:lnSpc>
-              <a:defRPr sz="1300">
+              <a:defRPr sz="1100">
                 <a:solidFill>
                   <a:srgbClr val="94A3B8"/>
                 </a:solidFill>
@@ -4044,14 +4393,14 @@
       </p:sp>
       <p:sp>
         <p:nvSpPr>
-          <p:cNvPr id="13" name="Right Arrow 12"/>
+          <p:cNvPr id="21" name="Right Arrow 20"/>
           <p:cNvSpPr/>
           <p:nvPr/>
         </p:nvSpPr>
         <p:spPr>
           <a:xfrm>
-            <a:off x="3919575" y="3429000"/>
-            <a:ext cx="420624" cy="274320"/>
+            <a:off x="3393795" y="3520440"/>
+            <a:ext cx="329184" cy="274320"/>
           </a:xfrm>
           <a:prstGeom prst="rightArrow">
             <a:avLst/>
@@ -4088,14 +4437,14 @@
       </p:sp>
       <p:sp>
         <p:nvSpPr>
-          <p:cNvPr id="14" name="Rounded Rectangle 13"/>
+          <p:cNvPr id="22" name="Rounded Rectangle 21"/>
           <p:cNvSpPr/>
           <p:nvPr/>
         </p:nvSpPr>
         <p:spPr>
           <a:xfrm>
-            <a:off x="4358487" y="2194560"/>
-            <a:ext cx="1508760" cy="2743200"/>
+            <a:off x="3741267" y="2194560"/>
+            <a:ext cx="1325880" cy="2926080"/>
           </a:xfrm>
           <a:prstGeom prst="roundRect">
             <a:avLst>
@@ -4136,13 +4485,13 @@
       </p:sp>
       <p:sp>
         <p:nvSpPr>
-          <p:cNvPr id="15" name="Oval 14"/>
+          <p:cNvPr id="23" name="Oval 22"/>
           <p:cNvSpPr/>
           <p:nvPr/>
         </p:nvSpPr>
         <p:spPr>
           <a:xfrm>
-            <a:off x="4861407" y="2468880"/>
+            <a:off x="4152747" y="2468880"/>
             <a:ext cx="502920" cy="502920"/>
           </a:xfrm>
           <a:prstGeom prst="ellipse">
@@ -4196,14 +4545,14 @@
       </p:sp>
       <p:sp>
         <p:nvSpPr>
-          <p:cNvPr id="16" name="TextBox 15"/>
+          <p:cNvPr id="24" name="TextBox 23"/>
           <p:cNvSpPr txBox="1"/>
           <p:nvPr/>
         </p:nvSpPr>
         <p:spPr>
           <a:xfrm>
-            <a:off x="4449927" y="3154680"/>
-            <a:ext cx="1325880" cy="457200"/>
+            <a:off x="3814419" y="3154680"/>
+            <a:ext cx="1179576" cy="594360"/>
           </a:xfrm>
           <a:prstGeom prst="rect">
             <a:avLst/>
@@ -4217,7 +4566,7 @@
           <a:lstStyle/>
           <a:p>
             <a:pPr algn="ctr">
-              <a:defRPr sz="1500" b="1">
+              <a:defRPr sz="1400" b="1">
                 <a:solidFill>
                   <a:srgbClr val="F8FAFC"/>
                 </a:solidFill>
@@ -4232,14 +4581,14 @@
       </p:sp>
       <p:sp>
         <p:nvSpPr>
-          <p:cNvPr id="17" name="TextBox 16"/>
+          <p:cNvPr id="25" name="TextBox 24"/>
           <p:cNvSpPr txBox="1"/>
           <p:nvPr/>
         </p:nvSpPr>
         <p:spPr>
           <a:xfrm>
-            <a:off x="4449927" y="3657600"/>
-            <a:ext cx="1325880" cy="1097280"/>
+            <a:off x="3814419" y="3749040"/>
+            <a:ext cx="1179576" cy="1280160"/>
           </a:xfrm>
           <a:prstGeom prst="rect">
             <a:avLst/>
@@ -4254,9 +4603,9 @@
           <a:p>
             <a:pPr algn="ctr">
               <a:lnSpc>
-                <a:spcPts val="1800"/>
+                <a:spcPts val="1500"/>
               </a:lnSpc>
-              <a:defRPr sz="1300">
+              <a:defRPr sz="1100">
                 <a:solidFill>
                   <a:srgbClr val="94A3B8"/>
                 </a:solidFill>
@@ -4275,14 +4624,14 @@
       </p:sp>
       <p:sp>
         <p:nvSpPr>
-          <p:cNvPr id="18" name="Right Arrow 17"/>
+          <p:cNvPr id="26" name="Right Arrow 25"/>
           <p:cNvSpPr/>
           <p:nvPr/>
         </p:nvSpPr>
         <p:spPr>
           <a:xfrm>
-            <a:off x="5885535" y="3429000"/>
-            <a:ext cx="420624" cy="274320"/>
+            <a:off x="5085435" y="3520440"/>
+            <a:ext cx="329184" cy="274320"/>
           </a:xfrm>
           <a:prstGeom prst="rightArrow">
             <a:avLst/>
@@ -4319,14 +4668,14 @@
       </p:sp>
       <p:sp>
         <p:nvSpPr>
-          <p:cNvPr id="19" name="Rounded Rectangle 18"/>
+          <p:cNvPr id="27" name="Rounded Rectangle 26"/>
           <p:cNvSpPr/>
           <p:nvPr/>
         </p:nvSpPr>
         <p:spPr>
           <a:xfrm>
-            <a:off x="6324447" y="2194560"/>
-            <a:ext cx="1508760" cy="2743200"/>
+            <a:off x="5432907" y="2194560"/>
+            <a:ext cx="1325880" cy="2926080"/>
           </a:xfrm>
           <a:prstGeom prst="roundRect">
             <a:avLst>
@@ -4367,13 +4716,13 @@
       </p:sp>
       <p:sp>
         <p:nvSpPr>
-          <p:cNvPr id="20" name="Oval 19"/>
+          <p:cNvPr id="28" name="Oval 27"/>
           <p:cNvSpPr/>
           <p:nvPr/>
         </p:nvSpPr>
         <p:spPr>
           <a:xfrm>
-            <a:off x="6827367" y="2468880"/>
+            <a:off x="5844387" y="2468880"/>
             <a:ext cx="502920" cy="502920"/>
           </a:xfrm>
           <a:prstGeom prst="ellipse">
@@ -4427,14 +4776,14 @@
       </p:sp>
       <p:sp>
         <p:nvSpPr>
-          <p:cNvPr id="21" name="TextBox 20"/>
+          <p:cNvPr id="29" name="TextBox 28"/>
           <p:cNvSpPr txBox="1"/>
           <p:nvPr/>
         </p:nvSpPr>
         <p:spPr>
           <a:xfrm>
-            <a:off x="6415887" y="3154680"/>
-            <a:ext cx="1325880" cy="457200"/>
+            <a:off x="5506059" y="3154680"/>
+            <a:ext cx="1179576" cy="594360"/>
           </a:xfrm>
           <a:prstGeom prst="rect">
             <a:avLst/>
@@ -4448,7 +4797,7 @@
           <a:lstStyle/>
           <a:p>
             <a:pPr algn="ctr">
-              <a:defRPr sz="1500" b="1">
+              <a:defRPr sz="1400" b="1">
                 <a:solidFill>
                   <a:srgbClr val="F8FAFC"/>
                 </a:solidFill>
@@ -4463,14 +4812,14 @@
       </p:sp>
       <p:sp>
         <p:nvSpPr>
-          <p:cNvPr id="22" name="TextBox 21"/>
+          <p:cNvPr id="30" name="TextBox 29"/>
           <p:cNvSpPr txBox="1"/>
           <p:nvPr/>
         </p:nvSpPr>
         <p:spPr>
           <a:xfrm>
-            <a:off x="6415887" y="3657600"/>
-            <a:ext cx="1325880" cy="1097280"/>
+            <a:off x="5506059" y="3749040"/>
+            <a:ext cx="1179576" cy="1280160"/>
           </a:xfrm>
           <a:prstGeom prst="rect">
             <a:avLst/>
@@ -4485,9 +4834,9 @@
           <a:p>
             <a:pPr algn="ctr">
               <a:lnSpc>
-                <a:spcPts val="1800"/>
+                <a:spcPts val="1500"/>
               </a:lnSpc>
-              <a:defRPr sz="1300">
+              <a:defRPr sz="1100">
                 <a:solidFill>
                   <a:srgbClr val="94A3B8"/>
                 </a:solidFill>
@@ -4506,14 +4855,14 @@
       </p:sp>
       <p:sp>
         <p:nvSpPr>
-          <p:cNvPr id="23" name="Right Arrow 22"/>
+          <p:cNvPr id="31" name="Right Arrow 30"/>
           <p:cNvSpPr/>
           <p:nvPr/>
         </p:nvSpPr>
         <p:spPr>
           <a:xfrm>
-            <a:off x="7851495" y="3429000"/>
-            <a:ext cx="420624" cy="274320"/>
+            <a:off x="6777075" y="3520440"/>
+            <a:ext cx="329184" cy="274320"/>
           </a:xfrm>
           <a:prstGeom prst="rightArrow">
             <a:avLst/>
@@ -4550,14 +4899,249 @@
       </p:sp>
       <p:sp>
         <p:nvSpPr>
-          <p:cNvPr id="24" name="Rounded Rectangle 23"/>
+          <p:cNvPr id="32" name="Rounded Rectangle 31"/>
           <p:cNvSpPr/>
           <p:nvPr/>
         </p:nvSpPr>
         <p:spPr>
           <a:xfrm>
-            <a:off x="8290407" y="2194560"/>
-            <a:ext cx="1508760" cy="2743200"/>
+            <a:off x="7124547" y="2194560"/>
+            <a:ext cx="1325880" cy="2926080"/>
+          </a:xfrm>
+          <a:prstGeom prst="roundRect">
+            <a:avLst>
+              <a:gd name="adj" fmla="val 10000"/>
+            </a:avLst>
+          </a:prstGeom>
+          <a:solidFill>
+            <a:srgbClr val="092A26"/>
+          </a:solidFill>
+          <a:ln w="19050">
+            <a:solidFill>
+              <a:srgbClr val="2DD4BF"/>
+            </a:solidFill>
+          </a:ln>
+          <a:effectLst/>
+        </p:spPr>
+        <p:style>
+          <a:lnRef idx="1">
+            <a:schemeClr val="accent1"/>
+          </a:lnRef>
+          <a:fillRef idx="3">
+            <a:schemeClr val="accent1"/>
+          </a:fillRef>
+          <a:effectRef idx="2">
+            <a:schemeClr val="accent1"/>
+          </a:effectRef>
+          <a:fontRef idx="minor">
+            <a:schemeClr val="lt1"/>
+          </a:fontRef>
+        </p:style>
+        <p:txBody>
+          <a:bodyPr rtlCol="0" anchor="ctr"/>
+          <a:lstStyle/>
+          <a:p>
+            <a:pPr algn="ctr"/>
+          </a:p>
+        </p:txBody>
+      </p:sp>
+      <p:sp>
+        <p:nvSpPr>
+          <p:cNvPr id="33" name="Oval 32"/>
+          <p:cNvSpPr/>
+          <p:nvPr/>
+        </p:nvSpPr>
+        <p:spPr>
+          <a:xfrm>
+            <a:off x="7536027" y="2468880"/>
+            <a:ext cx="502920" cy="502920"/>
+          </a:xfrm>
+          <a:prstGeom prst="ellipse">
+            <a:avLst/>
+          </a:prstGeom>
+          <a:solidFill>
+            <a:srgbClr val="2DD4BF"/>
+          </a:solidFill>
+          <a:ln>
+            <a:noFill/>
+          </a:ln>
+          <a:effectLst/>
+        </p:spPr>
+        <p:style>
+          <a:lnRef idx="1">
+            <a:schemeClr val="accent1"/>
+          </a:lnRef>
+          <a:fillRef idx="3">
+            <a:schemeClr val="accent1"/>
+          </a:fillRef>
+          <a:effectRef idx="2">
+            <a:schemeClr val="accent1"/>
+          </a:effectRef>
+          <a:fontRef idx="minor">
+            <a:schemeClr val="lt1"/>
+          </a:fontRef>
+        </p:style>
+        <p:txBody>
+          <a:bodyPr rtlCol="0" anchor="ctr" wrap="none"/>
+          <a:lstStyle/>
+          <a:p>
+            <a:pPr algn="ctr">
+              <a:spcBef>
+                <a:spcPts val="0"/>
+              </a:spcBef>
+              <a:spcAft>
+                <a:spcPts val="0"/>
+              </a:spcAft>
+              <a:defRPr sz="2000" b="1">
+                <a:solidFill>
+                  <a:srgbClr val="0F172A"/>
+                </a:solidFill>
+                <a:latin typeface="Segoe UI"/>
+              </a:defRPr>
+            </a:pPr>
+            <a:r>
+              <a:t>5</a:t>
+            </a:r>
+          </a:p>
+        </p:txBody>
+      </p:sp>
+      <p:sp>
+        <p:nvSpPr>
+          <p:cNvPr id="34" name="TextBox 33"/>
+          <p:cNvSpPr txBox="1"/>
+          <p:nvPr/>
+        </p:nvSpPr>
+        <p:spPr>
+          <a:xfrm>
+            <a:off x="7197699" y="3154680"/>
+            <a:ext cx="1179576" cy="594360"/>
+          </a:xfrm>
+          <a:prstGeom prst="rect">
+            <a:avLst/>
+          </a:prstGeom>
+          <a:noFill/>
+        </p:spPr>
+        <p:txBody>
+          <a:bodyPr wrap="square">
+            <a:spAutoFit/>
+          </a:bodyPr>
+          <a:lstStyle/>
+          <a:p>
+            <a:pPr algn="ctr">
+              <a:defRPr sz="1400" b="1">
+                <a:solidFill>
+                  <a:srgbClr val="F8FAFC"/>
+                </a:solidFill>
+                <a:latin typeface="Segoe UI"/>
+              </a:defRPr>
+            </a:pPr>
+            <a:r>
+              <a:t>Pre-pass</a:t>
+            </a:r>
+          </a:p>
+        </p:txBody>
+      </p:sp>
+      <p:sp>
+        <p:nvSpPr>
+          <p:cNvPr id="35" name="TextBox 34"/>
+          <p:cNvSpPr txBox="1"/>
+          <p:nvPr/>
+        </p:nvSpPr>
+        <p:spPr>
+          <a:xfrm>
+            <a:off x="7197699" y="3749040"/>
+            <a:ext cx="1179576" cy="1280160"/>
+          </a:xfrm>
+          <a:prstGeom prst="rect">
+            <a:avLst/>
+          </a:prstGeom>
+          <a:noFill/>
+        </p:spPr>
+        <p:txBody>
+          <a:bodyPr wrap="square">
+            <a:spAutoFit/>
+          </a:bodyPr>
+          <a:lstStyle/>
+          <a:p>
+            <a:pPr algn="ctr">
+              <a:lnSpc>
+                <a:spcPts val="1500"/>
+              </a:lnSpc>
+              <a:defRPr sz="1100">
+                <a:solidFill>
+                  <a:srgbClr val="94A3B8"/>
+                </a:solidFill>
+                <a:latin typeface="Segoe UI"/>
+              </a:defRPr>
+            </a:pPr>
+            <a:r>
+              <a:t>triageUrgent</a:t>
+            </a:r>
+            <a:br/>
+            <a:r>
+              <a:t>+ defuseChaos</a:t>
+            </a:r>
+            <a:br/>
+            <a:r>
+              <a:t>(no LLM)</a:t>
+            </a:r>
+          </a:p>
+        </p:txBody>
+      </p:sp>
+      <p:sp>
+        <p:nvSpPr>
+          <p:cNvPr id="36" name="Right Arrow 35"/>
+          <p:cNvSpPr/>
+          <p:nvPr/>
+        </p:nvSpPr>
+        <p:spPr>
+          <a:xfrm>
+            <a:off x="8468715" y="3520440"/>
+            <a:ext cx="329184" cy="274320"/>
+          </a:xfrm>
+          <a:prstGeom prst="rightArrow">
+            <a:avLst/>
+          </a:prstGeom>
+          <a:solidFill>
+            <a:srgbClr val="475569"/>
+          </a:solidFill>
+          <a:ln>
+            <a:noFill/>
+          </a:ln>
+          <a:effectLst/>
+        </p:spPr>
+        <p:style>
+          <a:lnRef idx="1">
+            <a:schemeClr val="accent1"/>
+          </a:lnRef>
+          <a:fillRef idx="3">
+            <a:schemeClr val="accent1"/>
+          </a:fillRef>
+          <a:effectRef idx="2">
+            <a:schemeClr val="accent1"/>
+          </a:effectRef>
+          <a:fontRef idx="minor">
+            <a:schemeClr val="lt1"/>
+          </a:fontRef>
+        </p:style>
+        <p:txBody>
+          <a:bodyPr rtlCol="0" anchor="ctr"/>
+          <a:lstStyle/>
+          <a:p>
+            <a:pPr algn="ctr"/>
+          </a:p>
+        </p:txBody>
+      </p:sp>
+      <p:sp>
+        <p:nvSpPr>
+          <p:cNvPr id="37" name="Rounded Rectangle 36"/>
+          <p:cNvSpPr/>
+          <p:nvPr/>
+        </p:nvSpPr>
+        <p:spPr>
+          <a:xfrm>
+            <a:off x="8816187" y="2194560"/>
+            <a:ext cx="1325880" cy="2926080"/>
           </a:xfrm>
           <a:prstGeom prst="roundRect">
             <a:avLst>
@@ -4598,13 +5182,13 @@
       </p:sp>
       <p:sp>
         <p:nvSpPr>
-          <p:cNvPr id="25" name="Oval 24"/>
+          <p:cNvPr id="38" name="Oval 37"/>
           <p:cNvSpPr/>
           <p:nvPr/>
         </p:nvSpPr>
         <p:spPr>
           <a:xfrm>
-            <a:off x="8793327" y="2468880"/>
+            <a:off x="9227667" y="2468880"/>
             <a:ext cx="502920" cy="502920"/>
           </a:xfrm>
           <a:prstGeom prst="ellipse">
@@ -4645,27 +5229,27 @@
               </a:spcAft>
               <a:defRPr sz="2000" b="1">
                 <a:solidFill>
-                  <a:srgbClr val="0F172A"/>
+                  <a:srgbClr val="F8FAFC"/>
                 </a:solidFill>
                 <a:latin typeface="Segoe UI"/>
               </a:defRPr>
             </a:pPr>
             <a:r>
-              <a:t>5</a:t>
-            </a:r>
-          </a:p>
-        </p:txBody>
-      </p:sp>
-      <p:sp>
-        <p:nvSpPr>
-          <p:cNvPr id="26" name="TextBox 25"/>
+              <a:t>6</a:t>
+            </a:r>
+          </a:p>
+        </p:txBody>
+      </p:sp>
+      <p:sp>
+        <p:nvSpPr>
+          <p:cNvPr id="39" name="TextBox 38"/>
           <p:cNvSpPr txBox="1"/>
           <p:nvPr/>
         </p:nvSpPr>
         <p:spPr>
           <a:xfrm>
-            <a:off x="8381847" y="3154680"/>
-            <a:ext cx="1325880" cy="457200"/>
+            <a:off x="8889339" y="3154680"/>
+            <a:ext cx="1179576" cy="594360"/>
           </a:xfrm>
           <a:prstGeom prst="rect">
             <a:avLst/>
@@ -4679,7 +5263,7 @@
           <a:lstStyle/>
           <a:p>
             <a:pPr algn="ctr">
-              <a:defRPr sz="1500" b="1">
+              <a:defRPr sz="1400" b="1">
                 <a:solidFill>
                   <a:srgbClr val="F8FAFC"/>
                 </a:solidFill>
@@ -4687,21 +5271,21 @@
               </a:defRPr>
             </a:pPr>
             <a:r>
-              <a:t>AI Agents</a:t>
-            </a:r>
-          </a:p>
-        </p:txBody>
-      </p:sp>
-      <p:sp>
-        <p:nvSpPr>
-          <p:cNvPr id="27" name="TextBox 26"/>
+              <a:t>Supervisor + 6</a:t>
+            </a:r>
+          </a:p>
+        </p:txBody>
+      </p:sp>
+      <p:sp>
+        <p:nvSpPr>
+          <p:cNvPr id="40" name="TextBox 39"/>
           <p:cNvSpPr txBox="1"/>
           <p:nvPr/>
         </p:nvSpPr>
         <p:spPr>
           <a:xfrm>
-            <a:off x="8381847" y="3657600"/>
-            <a:ext cx="1325880" cy="1097280"/>
+            <a:off x="8889339" y="3749040"/>
+            <a:ext cx="1179576" cy="1280160"/>
           </a:xfrm>
           <a:prstGeom prst="rect">
             <a:avLst/>
@@ -4716,9 +5300,9 @@
           <a:p>
             <a:pPr algn="ctr">
               <a:lnSpc>
-                <a:spcPts val="1800"/>
+                <a:spcPts val="1500"/>
               </a:lnSpc>
-              <a:defRPr sz="1300">
+              <a:defRPr sz="1100">
                 <a:solidFill>
                   <a:srgbClr val="94A3B8"/>
                 </a:solidFill>
@@ -4726,10 +5310,14 @@
               </a:defRPr>
             </a:pPr>
             <a:r>
-              <a:t>5 Sub-Agents</a:t>
+              <a:t>LangChain4j</a:t>
             </a:r>
             <a:br/>
             <a:r>
+              <a:t>6 Sub-Agents</a:t>
+            </a:r>
+            <a:br/>
+            <a:r>
               <a:t>+ Fallback</a:t>
             </a:r>
           </a:p>
@@ -4737,14 +5325,14 @@
       </p:sp>
       <p:sp>
         <p:nvSpPr>
-          <p:cNvPr id="28" name="Right Arrow 27"/>
+          <p:cNvPr id="41" name="Right Arrow 40"/>
           <p:cNvSpPr/>
           <p:nvPr/>
         </p:nvSpPr>
         <p:spPr>
           <a:xfrm>
-            <a:off x="9817455" y="3429000"/>
-            <a:ext cx="420624" cy="274320"/>
+            <a:off x="10160355" y="3520440"/>
+            <a:ext cx="329184" cy="274320"/>
           </a:xfrm>
           <a:prstGeom prst="rightArrow">
             <a:avLst/>
@@ -4781,14 +5369,14 @@
       </p:sp>
       <p:sp>
         <p:nvSpPr>
-          <p:cNvPr id="29" name="Rounded Rectangle 28"/>
+          <p:cNvPr id="42" name="Rounded Rectangle 41"/>
           <p:cNvSpPr/>
           <p:nvPr/>
         </p:nvSpPr>
         <p:spPr>
           <a:xfrm>
-            <a:off x="10256367" y="2194560"/>
-            <a:ext cx="1508760" cy="2743200"/>
+            <a:off x="10507827" y="2194560"/>
+            <a:ext cx="1325880" cy="2926080"/>
           </a:xfrm>
           <a:prstGeom prst="roundRect">
             <a:avLst>
@@ -4829,13 +5417,13 @@
       </p:sp>
       <p:sp>
         <p:nvSpPr>
-          <p:cNvPr id="30" name="Oval 29"/>
+          <p:cNvPr id="43" name="Oval 42"/>
           <p:cNvSpPr/>
           <p:nvPr/>
         </p:nvSpPr>
         <p:spPr>
           <a:xfrm>
-            <a:off x="10759287" y="2468880"/>
+            <a:off x="10919307" y="2468880"/>
             <a:ext cx="502920" cy="502920"/>
           </a:xfrm>
           <a:prstGeom prst="ellipse">
@@ -4882,21 +5470,21 @@
               </a:defRPr>
             </a:pPr>
             <a:r>
-              <a:t>6</a:t>
-            </a:r>
-          </a:p>
-        </p:txBody>
-      </p:sp>
-      <p:sp>
-        <p:nvSpPr>
-          <p:cNvPr id="31" name="TextBox 30"/>
+              <a:t>7</a:t>
+            </a:r>
+          </a:p>
+        </p:txBody>
+      </p:sp>
+      <p:sp>
+        <p:nvSpPr>
+          <p:cNvPr id="44" name="TextBox 43"/>
           <p:cNvSpPr txBox="1"/>
           <p:nvPr/>
         </p:nvSpPr>
         <p:spPr>
           <a:xfrm>
-            <a:off x="10347807" y="3154680"/>
-            <a:ext cx="1325880" cy="457200"/>
+            <a:off x="10580979" y="3154680"/>
+            <a:ext cx="1179576" cy="594360"/>
           </a:xfrm>
           <a:prstGeom prst="rect">
             <a:avLst/>
@@ -4910,7 +5498,7 @@
           <a:lstStyle/>
           <a:p>
             <a:pPr algn="ctr">
-              <a:defRPr sz="1500" b="1">
+              <a:defRPr sz="1400" b="1">
                 <a:solidFill>
                   <a:srgbClr val="F8FAFC"/>
                 </a:solidFill>
@@ -4925,14 +5513,14 @@
       </p:sp>
       <p:sp>
         <p:nvSpPr>
-          <p:cNvPr id="32" name="TextBox 31"/>
+          <p:cNvPr id="45" name="TextBox 44"/>
           <p:cNvSpPr txBox="1"/>
           <p:nvPr/>
         </p:nvSpPr>
         <p:spPr>
           <a:xfrm>
-            <a:off x="10347807" y="3657600"/>
-            <a:ext cx="1325880" cy="1097280"/>
+            <a:off x="10580979" y="3749040"/>
+            <a:ext cx="1179576" cy="1280160"/>
           </a:xfrm>
           <a:prstGeom prst="rect">
             <a:avLst/>
@@ -4947,9 +5535,9 @@
           <a:p>
             <a:pPr algn="ctr">
               <a:lnSpc>
-                <a:spcPts val="1800"/>
+                <a:spcPts val="1500"/>
               </a:lnSpc>
-              <a:defRPr sz="1300">
+              <a:defRPr sz="1100">
                 <a:solidFill>
                   <a:srgbClr val="94A3B8"/>
                 </a:solidFill>
@@ -4957,11 +5545,47 @@
               </a:defRPr>
             </a:pPr>
             <a:r>
-              <a:t>Mutations</a:t>
+              <a:t>Apply · Recalc</a:t>
             </a:r>
             <a:br/>
             <a:r>
-              <a:t>+ Persistence</a:t>
+              <a:t>+ Persist</a:t>
+            </a:r>
+          </a:p>
+        </p:txBody>
+      </p:sp>
+      <p:sp>
+        <p:nvSpPr>
+          <p:cNvPr id="46" name="TextBox 45"/>
+          <p:cNvSpPr txBox="1"/>
+          <p:nvPr/>
+        </p:nvSpPr>
+        <p:spPr>
+          <a:xfrm>
+            <a:off x="0" y="5943600"/>
+            <a:ext cx="12191695" cy="274320"/>
+          </a:xfrm>
+          <a:prstGeom prst="rect">
+            <a:avLst/>
+          </a:prstGeom>
+          <a:noFill/>
+        </p:spPr>
+        <p:txBody>
+          <a:bodyPr wrap="none">
+            <a:spAutoFit/>
+          </a:bodyPr>
+          <a:lstStyle/>
+          <a:p>
+            <a:pPr algn="ctr">
+              <a:defRPr sz="1200">
+                <a:solidFill>
+                  <a:srgbClr val="475569"/>
+                </a:solidFill>
+                <a:latin typeface="Segoe UI"/>
+              </a:defRPr>
+            </a:pPr>
+            <a:r>
+              <a:t>BEFORE score (1–4)  →  Pre-pass guarantees the drop (5)  →  AI rebalances (6)  →  Recalculate + persist (7)</a:t>
             </a:r>
           </a:p>
         </p:txBody>
